--- a/deliverables/PSLAB-SNS-automation-proposal.pptx
+++ b/deliverables/PSLAB-SNS-automation-proposal.pptx
@@ -1,6 +1,6 @@
 
 <file path=ppt/presentation.xml><?xml version="1.0" encoding="utf-8"?>
-<p:presentation xmlns:a="http://schemas.openxmlformats.org/drawingml/2006/main" xmlns:r="http://schemas.openxmlformats.org/officeDocument/2006/relationships" xmlns:p="http://schemas.openxmlformats.org/presentationml/2006/main" saveSubsetFonts="1" autoCompressPictures="0">
+<p:presentation xmlns:a="http://schemas.openxmlformats.org/drawingml/2006/main" xmlns:r="http://schemas.openxmlformats.org/officeDocument/2006/relationships" xmlns:p="http://schemas.openxmlformats.org/presentationml/2006/main" saveSubsetFonts="0" autoCompressPictures="0" embedTrueTypeFonts="1">
   <p:sldMasterIdLst>
     <p:sldMasterId id="2147483648" r:id="rId1"/>
   </p:sldMasterIdLst>
@@ -29,6 +29,13 @@
   </p:sldIdLst>
   <p:sldSz cx="12191695" cy="6858000" type="screen4x3"/>
   <p:notesSz cx="6858000" cy="9144000"/>
+  <p:embeddedFontLst>
+    <p:embeddedFont>
+      <p:font typeface="Pretendard"/>
+      <p:regular r:id="rIdFont1"/>
+      <p:bold r:id="rIdFont2"/>
+    </p:embeddedFont>
+  </p:embeddedFontLst>
   <p:defaultTextStyle>
     <a:defPPr>
       <a:defRPr lang="en-US"/>
@@ -3329,7 +3336,7 @@
                 <a:solidFill>
                   <a:srgbClr val="4D8BFF"/>
                 </a:solidFill>
-                <a:latin typeface="Malgun Gothic"/>
+                <a:latin typeface="Pretendard"/>
               </a:rPr>
               <a:t>S N S   채 널   자 동 화   솔 루 션</a:t>
             </a:r>
@@ -3368,7 +3375,7 @@
                 <a:solidFill>
                   <a:srgbClr val="F4F6FB"/>
                 </a:solidFill>
-                <a:latin typeface="Malgun Gothic"/>
+                <a:latin typeface="Pretendard"/>
               </a:rPr>
               <a:t>매일 올리지 않아도,</a:t>
             </a:r>
@@ -3384,7 +3391,7 @@
                 <a:solidFill>
                   <a:srgbClr val="F4F6FB"/>
                 </a:solidFill>
-                <a:latin typeface="Malgun Gothic"/>
+                <a:latin typeface="Pretendard"/>
               </a:rPr>
               <a:t>매일 쌓입니다</a:t>
             </a:r>
@@ -3423,7 +3430,7 @@
                 <a:solidFill>
                   <a:srgbClr val="AEB7C8"/>
                 </a:solidFill>
-                <a:latin typeface="Malgun Gothic"/>
+                <a:latin typeface="Pretendard"/>
               </a:rPr>
               <a:t>다섯 개의 채널을 한 번에, 사람 손 없이 자동으로 운영합니다.</a:t>
             </a:r>
@@ -3462,7 +3469,7 @@
                 <a:solidFill>
                   <a:srgbClr val="F4F6FB"/>
                 </a:solidFill>
-                <a:latin typeface="Malgun Gothic"/>
+                <a:latin typeface="Pretendard"/>
               </a:rPr>
               <a:t>인스타그램    ·    네이버 블로그    ·    구글 블로그    ·    스레드    ·    유튜브</a:t>
             </a:r>
@@ -3501,7 +3508,7 @@
                 <a:solidFill>
                   <a:srgbClr val="AEB7C8"/>
                 </a:solidFill>
-                <a:latin typeface="Malgun Gothic"/>
+                <a:latin typeface="Pretendard"/>
               </a:rPr>
               <a:t>● 실제 운영 예시 · PSLAB</a:t>
             </a:r>
@@ -3716,7 +3723,7 @@
                 <a:solidFill>
                   <a:srgbClr val="F4F6FB"/>
                 </a:solidFill>
-                <a:latin typeface="Malgun Gothic"/>
+                <a:latin typeface="Pretendard"/>
               </a:rPr>
               <a:t>인스타그램</a:t>
             </a:r>
@@ -3755,7 +3762,7 @@
                 <a:solidFill>
                   <a:srgbClr val="4D8BFF"/>
                 </a:solidFill>
-                <a:latin typeface="Malgun Gothic"/>
+                <a:latin typeface="Pretendard"/>
               </a:rPr>
               <a:t>카드뉴스 · 6장 캐러셀</a:t>
             </a:r>
@@ -3805,7 +3812,7 @@
                 <a:solidFill>
                   <a:srgbClr val="AEB7C8"/>
                 </a:solidFill>
-                <a:latin typeface="Malgun Gothic"/>
+                <a:latin typeface="Pretendard"/>
               </a:rPr>
               <a:t>핵심 인사이트를 저장하고 싶은 6장으로 재구성</a:t>
             </a:r>
@@ -3832,7 +3839,7 @@
                 <a:solidFill>
                   <a:srgbClr val="AEB7C8"/>
                 </a:solidFill>
-                <a:latin typeface="Malgun Gothic"/>
+                <a:latin typeface="Pretendard"/>
               </a:rPr>
               <a:t>첫 장에 강한 후킹 — 넘겨 보게 만듭니다</a:t>
             </a:r>
@@ -3859,7 +3866,7 @@
                 <a:solidFill>
                   <a:srgbClr val="AEB7C8"/>
                 </a:solidFill>
-                <a:latin typeface="Malgun Gothic"/>
+                <a:latin typeface="Pretendard"/>
               </a:rPr>
               <a:t>저장·공유가 늘도록 마지막 장에 결론을 명확히</a:t>
             </a:r>
@@ -3898,7 +3905,7 @@
                 <a:solidFill>
                   <a:srgbClr val="8B93A7"/>
                 </a:solidFill>
-                <a:latin typeface="Malgun Gothic"/>
+                <a:latin typeface="Pretendard"/>
               </a:rPr>
               <a:t>대시보드에서는 발행 카드와 참여율·좋아요가 채널 탭에 정리됩니다.</a:t>
             </a:r>
@@ -4003,7 +4010,7 @@
                 <a:solidFill>
                   <a:srgbClr val="8B93A7"/>
                 </a:solidFill>
-                <a:latin typeface="Malgun Gothic"/>
+                <a:latin typeface="Pretendard"/>
               </a:rPr>
               <a:t>pslab — 인스타그램</a:t>
             </a:r>
@@ -4242,7 +4249,7 @@
                 <a:solidFill>
                   <a:srgbClr val="F4F6FB"/>
                 </a:solidFill>
-                <a:latin typeface="Malgun Gothic"/>
+                <a:latin typeface="Pretendard"/>
               </a:rPr>
               <a:t>네이버 블로그</a:t>
             </a:r>
@@ -4281,7 +4288,7 @@
                 <a:solidFill>
                   <a:srgbClr val="4D8BFF"/>
                 </a:solidFill>
-                <a:latin typeface="Malgun Gothic"/>
+                <a:latin typeface="Pretendard"/>
               </a:rPr>
               <a:t>검색 최적화 장문 글</a:t>
             </a:r>
@@ -4331,7 +4338,7 @@
                 <a:solidFill>
                   <a:srgbClr val="AEB7C8"/>
                 </a:solidFill>
-                <a:latin typeface="Malgun Gothic"/>
+                <a:latin typeface="Pretendard"/>
               </a:rPr>
               <a:t>키워드 검색량·경쟁도를 조사해 노려볼 주제 선정</a:t>
             </a:r>
@@ -4358,7 +4365,7 @@
                 <a:solidFill>
                   <a:srgbClr val="AEB7C8"/>
                 </a:solidFill>
-                <a:latin typeface="Malgun Gothic"/>
+                <a:latin typeface="Pretendard"/>
               </a:rPr>
               <a:t>검색에 잘 걸리도록 제목·본문을 구조화</a:t>
             </a:r>
@@ -4385,7 +4392,7 @@
                 <a:solidFill>
                   <a:srgbClr val="AEB7C8"/>
                 </a:solidFill>
-                <a:latin typeface="Malgun Gothic"/>
+                <a:latin typeface="Pretendard"/>
               </a:rPr>
               <a:t>블로그 지수를 꾸준히 관리해 노출을 키움</a:t>
             </a:r>
@@ -4424,7 +4431,7 @@
                 <a:solidFill>
                   <a:srgbClr val="8B93A7"/>
                 </a:solidFill>
-                <a:latin typeface="Malgun Gothic"/>
+                <a:latin typeface="Pretendard"/>
               </a:rPr>
               <a:t>대시보드에서는 키워드 지수와 블로그 점수가 한눈에 보입니다.</a:t>
             </a:r>
@@ -4529,7 +4536,7 @@
                 <a:solidFill>
                   <a:srgbClr val="8B93A7"/>
                 </a:solidFill>
-                <a:latin typeface="Malgun Gothic"/>
+                <a:latin typeface="Pretendard"/>
               </a:rPr>
               <a:t>pslab — 네이버 블로그</a:t>
             </a:r>
@@ -4768,7 +4775,7 @@
                 <a:solidFill>
                   <a:srgbClr val="F4F6FB"/>
                 </a:solidFill>
-                <a:latin typeface="Malgun Gothic"/>
+                <a:latin typeface="Pretendard"/>
               </a:rPr>
               <a:t>구글 블로그</a:t>
             </a:r>
@@ -4807,7 +4814,7 @@
                 <a:solidFill>
                   <a:srgbClr val="4D8BFF"/>
                 </a:solidFill>
-                <a:latin typeface="Malgun Gothic"/>
+                <a:latin typeface="Pretendard"/>
               </a:rPr>
               <a:t>정보성 아티클 · SEO</a:t>
             </a:r>
@@ -4857,7 +4864,7 @@
                 <a:solidFill>
                   <a:srgbClr val="AEB7C8"/>
                 </a:solidFill>
-                <a:latin typeface="Malgun Gothic"/>
+                <a:latin typeface="Pretendard"/>
               </a:rPr>
               <a:t>구글 검색까지 노리는 깊이 있는 글</a:t>
             </a:r>
@@ -4884,7 +4891,7 @@
                 <a:solidFill>
                   <a:srgbClr val="AEB7C8"/>
                 </a:solidFill>
-                <a:latin typeface="Malgun Gothic"/>
+                <a:latin typeface="Pretendard"/>
               </a:rPr>
               <a:t>대표이미지 + 본문 이미지로 읽기 좋게</a:t>
             </a:r>
@@ -4911,7 +4918,7 @@
                 <a:solidFill>
                   <a:srgbClr val="AEB7C8"/>
                 </a:solidFill>
-                <a:latin typeface="Malgun Gothic"/>
+                <a:latin typeface="Pretendard"/>
               </a:rPr>
               <a:t>해외·전문 검색 유입까지 확장</a:t>
             </a:r>
@@ -4950,7 +4957,7 @@
                 <a:solidFill>
                   <a:srgbClr val="8B93A7"/>
                 </a:solidFill>
-                <a:latin typeface="Malgun Gothic"/>
+                <a:latin typeface="Pretendard"/>
               </a:rPr>
               <a:t>대시보드에서는 발행 글과 대표이미지를 바로 확인·관리합니다.</a:t>
             </a:r>
@@ -5055,7 +5062,7 @@
                 <a:solidFill>
                   <a:srgbClr val="8B93A7"/>
                 </a:solidFill>
-                <a:latin typeface="Malgun Gothic"/>
+                <a:latin typeface="Pretendard"/>
               </a:rPr>
               <a:t>pslab — 구글 블로그</a:t>
             </a:r>
@@ -5294,7 +5301,7 @@
                 <a:solidFill>
                   <a:srgbClr val="F4F6FB"/>
                 </a:solidFill>
-                <a:latin typeface="Malgun Gothic"/>
+                <a:latin typeface="Pretendard"/>
               </a:rPr>
               <a:t>스레드</a:t>
             </a:r>
@@ -5333,7 +5340,7 @@
                 <a:solidFill>
                   <a:srgbClr val="4D8BFF"/>
                 </a:solidFill>
-                <a:latin typeface="Malgun Gothic"/>
+                <a:latin typeface="Pretendard"/>
               </a:rPr>
               <a:t>짧은 대화형 인사이트</a:t>
             </a:r>
@@ -5383,7 +5390,7 @@
                 <a:solidFill>
                   <a:srgbClr val="AEB7C8"/>
                 </a:solidFill>
-                <a:latin typeface="Malgun Gothic"/>
+                <a:latin typeface="Pretendard"/>
               </a:rPr>
               <a:t>실시간 이슈를 가볍고 빠르게</a:t>
             </a:r>
@@ -5410,7 +5417,7 @@
                 <a:solidFill>
                   <a:srgbClr val="AEB7C8"/>
                 </a:solidFill>
-                <a:latin typeface="Malgun Gothic"/>
+                <a:latin typeface="Pretendard"/>
               </a:rPr>
               <a:t>댓글·재게시로 대화를 유도</a:t>
             </a:r>
@@ -5437,7 +5444,7 @@
                 <a:solidFill>
                   <a:srgbClr val="AEB7C8"/>
                 </a:solidFill>
-                <a:latin typeface="Malgun Gothic"/>
+                <a:latin typeface="Pretendard"/>
               </a:rPr>
               <a:t>브랜드를 친근하게 각인</a:t>
             </a:r>
@@ -5476,7 +5483,7 @@
                 <a:solidFill>
                   <a:srgbClr val="8B93A7"/>
                 </a:solidFill>
-                <a:latin typeface="Malgun Gothic"/>
+                <a:latin typeface="Pretendard"/>
               </a:rPr>
               <a:t>대시보드에서는 발행 글과 조회·반응이 함께 정리됩니다.</a:t>
             </a:r>
@@ -5581,7 +5588,7 @@
                 <a:solidFill>
                   <a:srgbClr val="8B93A7"/>
                 </a:solidFill>
-                <a:latin typeface="Malgun Gothic"/>
+                <a:latin typeface="Pretendard"/>
               </a:rPr>
               <a:t>pslab — 스레드</a:t>
             </a:r>
@@ -5820,7 +5827,7 @@
                 <a:solidFill>
                   <a:srgbClr val="F4F6FB"/>
                 </a:solidFill>
-                <a:latin typeface="Malgun Gothic"/>
+                <a:latin typeface="Pretendard"/>
               </a:rPr>
               <a:t>유튜브</a:t>
             </a:r>
@@ -5859,7 +5866,7 @@
                 <a:solidFill>
                   <a:srgbClr val="4D8BFF"/>
                 </a:solidFill>
-                <a:latin typeface="Malgun Gothic"/>
+                <a:latin typeface="Pretendard"/>
               </a:rPr>
               <a:t>30초 쇼츠 영상</a:t>
             </a:r>
@@ -5909,7 +5916,7 @@
                 <a:solidFill>
                   <a:srgbClr val="AEB7C8"/>
                 </a:solidFill>
-                <a:latin typeface="Malgun Gothic"/>
+                <a:latin typeface="Pretendard"/>
               </a:rPr>
               <a:t>후킹 → 핵심 → 행동유도 3단 구성</a:t>
             </a:r>
@@ -5936,7 +5943,7 @@
                 <a:solidFill>
                   <a:srgbClr val="AEB7C8"/>
                 </a:solidFill>
-                <a:latin typeface="Malgun Gothic"/>
+                <a:latin typeface="Pretendard"/>
               </a:rPr>
               <a:t>배경·자막·음악까지 자동 제작</a:t>
             </a:r>
@@ -5963,7 +5970,7 @@
                 <a:solidFill>
                   <a:srgbClr val="AEB7C8"/>
                 </a:solidFill>
-                <a:latin typeface="Malgun Gothic"/>
+                <a:latin typeface="Pretendard"/>
               </a:rPr>
               <a:t>알고리즘 노출로 신규 도달 확대</a:t>
             </a:r>
@@ -6002,7 +6009,7 @@
                 <a:solidFill>
                   <a:srgbClr val="8B93A7"/>
                 </a:solidFill>
-                <a:latin typeface="Malgun Gothic"/>
+                <a:latin typeface="Pretendard"/>
               </a:rPr>
               <a:t>대시보드에서는 쇼츠 영상과 조회수가 채널 탭에 정리됩니다.</a:t>
             </a:r>
@@ -6107,7 +6114,7 @@
                 <a:solidFill>
                   <a:srgbClr val="8B93A7"/>
                 </a:solidFill>
-                <a:latin typeface="Malgun Gothic"/>
+                <a:latin typeface="Pretendard"/>
               </a:rPr>
               <a:t>pslab — 유튜브</a:t>
             </a:r>
@@ -6390,7 +6397,7 @@
                 <a:solidFill>
                   <a:srgbClr val="4D8BFF"/>
                 </a:solidFill>
-                <a:latin typeface="Malgun Gothic"/>
+                <a:latin typeface="Pretendard"/>
               </a:rPr>
               <a:t>편리함</a:t>
             </a:r>
@@ -6429,7 +6436,7 @@
                 <a:solidFill>
                   <a:srgbClr val="F4F6FB"/>
                 </a:solidFill>
-                <a:latin typeface="Malgun Gothic"/>
+                <a:latin typeface="Pretendard"/>
               </a:rPr>
               <a:t>정해진 시간에,</a:t>
             </a:r>
@@ -6445,7 +6452,7 @@
                 <a:solidFill>
                   <a:srgbClr val="F4F6FB"/>
                 </a:solidFill>
-                <a:latin typeface="Malgun Gothic"/>
+                <a:latin typeface="Pretendard"/>
               </a:rPr>
               <a:t>알아서 올라갑니다</a:t>
             </a:r>
@@ -6484,7 +6491,7 @@
                 <a:solidFill>
                   <a:srgbClr val="AEB7C8"/>
                 </a:solidFill>
-                <a:latin typeface="Malgun Gothic"/>
+                <a:latin typeface="Pretendard"/>
               </a:rPr>
               <a:t>밥솥에 예약을 걸어두면 아침에 밥이 되어 있는 것처럼, 시간만 정해두면 매일 저녁 6시에 콘텐츠가 스스로 발행됩니다.</a:t>
             </a:r>
@@ -6543,7 +6550,7 @@
                 <a:solidFill>
                   <a:srgbClr val="4D8BFF"/>
                 </a:solidFill>
-                <a:latin typeface="Malgun Gothic"/>
+                <a:latin typeface="Pretendard"/>
               </a:rPr>
               <a:t>예약</a:t>
             </a:r>
@@ -6559,7 +6566,7 @@
                 <a:solidFill>
                   <a:srgbClr val="F4F6FB"/>
                 </a:solidFill>
-                <a:latin typeface="Malgun Gothic"/>
+                <a:latin typeface="Pretendard"/>
               </a:rPr>
               <a:t>시간만 한 번</a:t>
             </a:r>
@@ -6578,7 +6585,7 @@
                 <a:solidFill>
                   <a:srgbClr val="AEB7C8"/>
                 </a:solidFill>
-                <a:latin typeface="Malgun Gothic"/>
+                <a:latin typeface="Pretendard"/>
               </a:rPr>
               <a:t>발행 시각을 정해두면 끝</a:t>
             </a:r>
@@ -6637,7 +6644,7 @@
                 <a:solidFill>
                   <a:srgbClr val="4D8BFF"/>
                 </a:solidFill>
-                <a:latin typeface="Malgun Gothic"/>
+                <a:latin typeface="Pretendard"/>
               </a:rPr>
               <a:t>자동</a:t>
             </a:r>
@@ -6653,7 +6660,7 @@
                 <a:solidFill>
                   <a:srgbClr val="F4F6FB"/>
                 </a:solidFill>
-                <a:latin typeface="Malgun Gothic"/>
+                <a:latin typeface="Pretendard"/>
               </a:rPr>
               <a:t>매일 반복</a:t>
             </a:r>
@@ -6672,7 +6679,7 @@
                 <a:solidFill>
                   <a:srgbClr val="AEB7C8"/>
                 </a:solidFill>
-                <a:latin typeface="Malgun Gothic"/>
+                <a:latin typeface="Pretendard"/>
               </a:rPr>
               <a:t>주말·휴일에도 쉬지 않음</a:t>
             </a:r>
@@ -6731,7 +6738,7 @@
                 <a:solidFill>
                   <a:srgbClr val="4D8BFF"/>
                 </a:solidFill>
-                <a:latin typeface="Malgun Gothic"/>
+                <a:latin typeface="Pretendard"/>
               </a:rPr>
               <a:t>안심</a:t>
             </a:r>
@@ -6747,7 +6754,7 @@
                 <a:solidFill>
                   <a:srgbClr val="F4F6FB"/>
                 </a:solidFill>
-                <a:latin typeface="Malgun Gothic"/>
+                <a:latin typeface="Pretendard"/>
               </a:rPr>
               <a:t>실패하면 알림</a:t>
             </a:r>
@@ -6766,7 +6773,7 @@
                 <a:solidFill>
                   <a:srgbClr val="AEB7C8"/>
                 </a:solidFill>
-                <a:latin typeface="Malgun Gothic"/>
+                <a:latin typeface="Pretendard"/>
               </a:rPr>
               <a:t>문제가 생기면 즉시 문자 알림</a:t>
             </a:r>
@@ -7025,7 +7032,7 @@
                 <a:solidFill>
                   <a:srgbClr val="4D8BFF"/>
                 </a:solidFill>
-                <a:latin typeface="Malgun Gothic"/>
+                <a:latin typeface="Pretendard"/>
               </a:rPr>
               <a:t>성과가 보입니다</a:t>
             </a:r>
@@ -7064,7 +7071,7 @@
                 <a:solidFill>
                   <a:srgbClr val="F4F6FB"/>
                 </a:solidFill>
-                <a:latin typeface="Malgun Gothic"/>
+                <a:latin typeface="Pretendard"/>
               </a:rPr>
               <a:t>무엇이 잘 됐는지,</a:t>
             </a:r>
@@ -7080,7 +7087,7 @@
                 <a:solidFill>
                   <a:srgbClr val="F4F6FB"/>
                 </a:solidFill>
-                <a:latin typeface="Malgun Gothic"/>
+                <a:latin typeface="Pretendard"/>
               </a:rPr>
               <a:t>한눈에 보입니다</a:t>
             </a:r>
@@ -7119,7 +7126,7 @@
                 <a:solidFill>
                   <a:srgbClr val="AEB7C8"/>
                 </a:solidFill>
-                <a:latin typeface="Malgun Gothic"/>
+                <a:latin typeface="Pretendard"/>
               </a:rPr>
               <a:t>반응이 좋았던 주제·시간대·디자인을 스스로 학습해 다음 콘텐츠에 반영합니다.</a:t>
             </a:r>
@@ -7158,7 +7165,7 @@
                 <a:solidFill>
                   <a:srgbClr val="4D8BFF"/>
                 </a:solidFill>
-                <a:latin typeface="Malgun Gothic"/>
+                <a:latin typeface="Pretendard"/>
               </a:rPr>
               <a:t>166%</a:t>
             </a:r>
@@ -7197,7 +7204,7 @@
                 <a:solidFill>
                   <a:srgbClr val="AEB7C8"/>
                 </a:solidFill>
-                <a:latin typeface="Malgun Gothic"/>
+                <a:latin typeface="Pretendard"/>
               </a:rPr>
               <a:t>가장 반응이 좋았던 콘텐츠의 참여율</a:t>
             </a:r>
@@ -7236,7 +7243,7 @@
                 <a:solidFill>
                   <a:srgbClr val="4D8BFF"/>
                 </a:solidFill>
-                <a:latin typeface="Malgun Gothic"/>
+                <a:latin typeface="Pretendard"/>
               </a:rPr>
               <a:t>21시</a:t>
             </a:r>
@@ -7275,7 +7282,7 @@
                 <a:solidFill>
                   <a:srgbClr val="AEB7C8"/>
                 </a:solidFill>
-                <a:latin typeface="Malgun Gothic"/>
+                <a:latin typeface="Pretendard"/>
               </a:rPr>
               <a:t>반응이 가장 좋은 시간대를 자동 파악</a:t>
             </a:r>
@@ -7314,7 +7321,7 @@
                 <a:solidFill>
                   <a:srgbClr val="4D8BFF"/>
                 </a:solidFill>
-                <a:latin typeface="Malgun Gothic"/>
+                <a:latin typeface="Pretendard"/>
               </a:rPr>
               <a:t>매주</a:t>
             </a:r>
@@ -7353,7 +7360,7 @@
                 <a:solidFill>
                   <a:srgbClr val="AEB7C8"/>
                 </a:solidFill>
-                <a:latin typeface="Malgun Gothic"/>
+                <a:latin typeface="Pretendard"/>
               </a:rPr>
               <a:t>성과 리포트를 자동으로 정리</a:t>
             </a:r>
@@ -7458,7 +7465,7 @@
                 <a:solidFill>
                   <a:srgbClr val="8B93A7"/>
                 </a:solidFill>
-                <a:latin typeface="Malgun Gothic"/>
+                <a:latin typeface="Pretendard"/>
               </a:rPr>
               <a:t>pslab — 성과 현황</a:t>
             </a:r>
@@ -7741,7 +7748,7 @@
                 <a:solidFill>
                   <a:srgbClr val="FFB454"/>
                 </a:solidFill>
-                <a:latin typeface="Malgun Gothic"/>
+                <a:latin typeface="Pretendard"/>
               </a:rPr>
               <a:t>비용</a:t>
             </a:r>
@@ -7780,7 +7787,7 @@
                 <a:solidFill>
                   <a:srgbClr val="F4F6FB"/>
                 </a:solidFill>
-                <a:latin typeface="Malgun Gothic"/>
+                <a:latin typeface="Pretendard"/>
               </a:rPr>
               <a:t>직원 한 명보다 저렴하게, 5채널 전부</a:t>
             </a:r>
@@ -7865,7 +7872,7 @@
                 <a:solidFill>
                   <a:srgbClr val="AEB7C8"/>
                 </a:solidFill>
-                <a:latin typeface="Malgun Gothic"/>
+                <a:latin typeface="Pretendard"/>
               </a:rPr>
               <a:t>직원 1명 채용</a:t>
             </a:r>
@@ -7904,7 +7911,7 @@
                 <a:solidFill>
                   <a:srgbClr val="FF9A9A"/>
                 </a:solidFill>
-                <a:latin typeface="Malgun Gothic"/>
+                <a:latin typeface="Pretendard"/>
               </a:rPr>
               <a:t>월 350~450만원</a:t>
             </a:r>
@@ -7943,7 +7950,7 @@
                 <a:solidFill>
                   <a:srgbClr val="8B93A7"/>
                 </a:solidFill>
-                <a:latin typeface="Malgun Gothic"/>
+                <a:latin typeface="Pretendard"/>
               </a:rPr>
               <a:t>급여+4대보험+퇴직+장비</a:t>
             </a:r>
@@ -7982,7 +7989,7 @@
                 <a:solidFill>
                   <a:srgbClr val="AEB7C8"/>
                 </a:solidFill>
-                <a:latin typeface="Malgun Gothic"/>
+                <a:latin typeface="Pretendard"/>
               </a:rPr>
               <a:t>· 한 사람이 5채널을 다 못함</a:t>
             </a:r>
@@ -7998,7 +8005,7 @@
                 <a:solidFill>
                   <a:srgbClr val="AEB7C8"/>
                 </a:solidFill>
-                <a:latin typeface="Malgun Gothic"/>
+                <a:latin typeface="Pretendard"/>
               </a:rPr>
               <a:t>· 퇴사하면 채널이 멈춤</a:t>
             </a:r>
@@ -8014,7 +8021,7 @@
                 <a:solidFill>
                   <a:srgbClr val="AEB7C8"/>
                 </a:solidFill>
-                <a:latin typeface="Malgun Gothic"/>
+                <a:latin typeface="Pretendard"/>
               </a:rPr>
               <a:t>· 휴가·병가 공백</a:t>
             </a:r>
@@ -8099,7 +8106,7 @@
                 <a:solidFill>
                   <a:srgbClr val="AEB7C8"/>
                 </a:solidFill>
-                <a:latin typeface="Malgun Gothic"/>
+                <a:latin typeface="Pretendard"/>
               </a:rPr>
               <a:t>대행사 (5채널)</a:t>
             </a:r>
@@ -8138,7 +8145,7 @@
                 <a:solidFill>
                   <a:srgbClr val="FF9A9A"/>
                 </a:solidFill>
-                <a:latin typeface="Malgun Gothic"/>
+                <a:latin typeface="Pretendard"/>
               </a:rPr>
               <a:t>월 300~700만원</a:t>
             </a:r>
@@ -8177,7 +8184,7 @@
                 <a:solidFill>
                   <a:srgbClr val="8B93A7"/>
                 </a:solidFill>
-                <a:latin typeface="Malgun Gothic"/>
+                <a:latin typeface="Pretendard"/>
               </a:rPr>
               <a:t>채널마다 따로 비용</a:t>
             </a:r>
@@ -8216,7 +8223,7 @@
                 <a:solidFill>
                   <a:srgbClr val="AEB7C8"/>
                 </a:solidFill>
-                <a:latin typeface="Malgun Gothic"/>
+                <a:latin typeface="Pretendard"/>
               </a:rPr>
               <a:t>· 채널 늘수록 비용 급증</a:t>
             </a:r>
@@ -8232,7 +8239,7 @@
                 <a:solidFill>
                   <a:srgbClr val="AEB7C8"/>
                 </a:solidFill>
-                <a:latin typeface="Malgun Gothic"/>
+                <a:latin typeface="Pretendard"/>
               </a:rPr>
               <a:t>· 내 브랜드 이해도 낮음</a:t>
             </a:r>
@@ -8248,7 +8255,7 @@
                 <a:solidFill>
                   <a:srgbClr val="AEB7C8"/>
                 </a:solidFill>
-                <a:latin typeface="Malgun Gothic"/>
+                <a:latin typeface="Pretendard"/>
               </a:rPr>
               <a:t>· 영상은 별도 견적</a:t>
             </a:r>
@@ -8333,7 +8340,7 @@
                 <a:solidFill>
                   <a:srgbClr val="4D8BFF"/>
                 </a:solidFill>
-                <a:latin typeface="Malgun Gothic"/>
+                <a:latin typeface="Pretendard"/>
               </a:rPr>
               <a:t>추천 · 이 솔루션 · PSLAB</a:t>
             </a:r>
@@ -8372,7 +8379,7 @@
                 <a:solidFill>
                   <a:srgbClr val="F4F6FB"/>
                 </a:solidFill>
-                <a:latin typeface="Malgun Gothic"/>
+                <a:latin typeface="Pretendard"/>
               </a:rPr>
               <a:t>월 200만원</a:t>
             </a:r>
@@ -8411,7 +8418,7 @@
                 <a:solidFill>
                   <a:srgbClr val="8B93A7"/>
                 </a:solidFill>
-                <a:latin typeface="Malgun Gothic"/>
+                <a:latin typeface="Pretendard"/>
               </a:rPr>
               <a:t>정액 · 5채널 전부 포함</a:t>
             </a:r>
@@ -8450,7 +8457,7 @@
                 <a:solidFill>
                   <a:srgbClr val="DFE7F5"/>
                 </a:solidFill>
-                <a:latin typeface="Malgun Gothic"/>
+                <a:latin typeface="Pretendard"/>
               </a:rPr>
               <a:t>✓ 인스타·네이버·구글·스레드·유튜브 전부</a:t>
             </a:r>
@@ -8466,7 +8473,7 @@
                 <a:solidFill>
                   <a:srgbClr val="DFE7F5"/>
                 </a:solidFill>
-                <a:latin typeface="Malgun Gothic"/>
+                <a:latin typeface="Pretendard"/>
               </a:rPr>
               <a:t>✓ 조사·기획·글·이미지·영상까지 자동</a:t>
             </a:r>
@@ -8482,7 +8489,7 @@
                 <a:solidFill>
                   <a:srgbClr val="DFE7F5"/>
                 </a:solidFill>
-                <a:latin typeface="Malgun Gothic"/>
+                <a:latin typeface="Pretendard"/>
               </a:rPr>
               <a:t>✓ 24시간 · 사람 없이 · 안 멈춤</a:t>
             </a:r>
@@ -8741,7 +8748,7 @@
                 <a:solidFill>
                   <a:srgbClr val="FFB454"/>
                 </a:solidFill>
-                <a:latin typeface="Malgun Gothic"/>
+                <a:latin typeface="Pretendard"/>
               </a:rPr>
               <a:t>돈으로 환산하면</a:t>
             </a:r>
@@ -8780,7 +8787,7 @@
                 <a:solidFill>
                   <a:srgbClr val="F4F6FB"/>
                 </a:solidFill>
-                <a:latin typeface="Malgun Gothic"/>
+                <a:latin typeface="Pretendard"/>
               </a:rPr>
               <a:t>월 200만원으로,</a:t>
             </a:r>
@@ -8796,7 +8803,7 @@
                 <a:solidFill>
                   <a:srgbClr val="F4F6FB"/>
                 </a:solidFill>
-                <a:latin typeface="Malgun Gothic"/>
+                <a:latin typeface="Pretendard"/>
               </a:rPr>
               <a:t>이만큼을 대신합니다</a:t>
             </a:r>
@@ -8835,7 +8842,7 @@
                 <a:solidFill>
                   <a:srgbClr val="F4F6FB"/>
                 </a:solidFill>
-                <a:latin typeface="Malgun Gothic"/>
+                <a:latin typeface="Pretendard"/>
               </a:rPr>
               <a:t>사람 1명 인건비 대체</a:t>
             </a:r>
@@ -8874,7 +8881,7 @@
                 <a:solidFill>
                   <a:srgbClr val="8B93A7"/>
                 </a:solidFill>
-                <a:latin typeface="Malgun Gothic"/>
+                <a:latin typeface="Pretendard"/>
               </a:rPr>
               <a:t>조사·기획·제작·업로드를 대신</a:t>
             </a:r>
@@ -8913,7 +8920,7 @@
                 <a:solidFill>
                   <a:srgbClr val="4D8BFF"/>
                 </a:solidFill>
-                <a:latin typeface="Malgun Gothic"/>
+                <a:latin typeface="Pretendard"/>
               </a:rPr>
               <a:t>월 400만원</a:t>
             </a:r>
@@ -8996,7 +9003,7 @@
                 <a:solidFill>
                   <a:srgbClr val="F4F6FB"/>
                 </a:solidFill>
-                <a:latin typeface="Malgun Gothic"/>
+                <a:latin typeface="Pretendard"/>
               </a:rPr>
               <a:t>대행사 5채널 대체</a:t>
             </a:r>
@@ -9035,7 +9042,7 @@
                 <a:solidFill>
                   <a:srgbClr val="8B93A7"/>
                 </a:solidFill>
-                <a:latin typeface="Malgun Gothic"/>
+                <a:latin typeface="Pretendard"/>
               </a:rPr>
               <a:t>채널별 대행비 절감</a:t>
             </a:r>
@@ -9074,7 +9081,7 @@
                 <a:solidFill>
                   <a:srgbClr val="4D8BFF"/>
                 </a:solidFill>
-                <a:latin typeface="Malgun Gothic"/>
+                <a:latin typeface="Pretendard"/>
               </a:rPr>
               <a:t>월 300만원+</a:t>
             </a:r>
@@ -9157,7 +9164,7 @@
                 <a:solidFill>
                   <a:srgbClr val="F4F6FB"/>
                 </a:solidFill>
-                <a:latin typeface="Malgun Gothic"/>
+                <a:latin typeface="Pretendard"/>
               </a:rPr>
               <a:t>회수되는 내 시간</a:t>
             </a:r>
@@ -9196,7 +9203,7 @@
                 <a:solidFill>
                   <a:srgbClr val="8B93A7"/>
                 </a:solidFill>
-                <a:latin typeface="Malgun Gothic"/>
+                <a:latin typeface="Pretendard"/>
               </a:rPr>
               <a:t>주 10시간 → 본업에 집중</a:t>
             </a:r>
@@ -9235,7 +9242,7 @@
                 <a:solidFill>
                   <a:srgbClr val="4D8BFF"/>
                 </a:solidFill>
-                <a:latin typeface="Malgun Gothic"/>
+                <a:latin typeface="Pretendard"/>
               </a:rPr>
               <a:t>월 40시간+</a:t>
             </a:r>
@@ -9318,7 +9325,7 @@
                 <a:solidFill>
                   <a:srgbClr val="F4F6FB"/>
                 </a:solidFill>
-                <a:latin typeface="Malgun Gothic"/>
+                <a:latin typeface="Pretendard"/>
               </a:rPr>
               <a:t>쌓이는 콘텐츠 자산</a:t>
             </a:r>
@@ -9357,7 +9364,7 @@
                 <a:solidFill>
                   <a:srgbClr val="8B93A7"/>
                 </a:solidFill>
-                <a:latin typeface="Malgun Gothic"/>
+                <a:latin typeface="Pretendard"/>
               </a:rPr>
               <a:t>검색에 남는 영구 자산</a:t>
             </a:r>
@@ -9396,7 +9403,7 @@
                 <a:solidFill>
                   <a:srgbClr val="4D8BFF"/>
                 </a:solidFill>
-                <a:latin typeface="Malgun Gothic"/>
+                <a:latin typeface="Pretendard"/>
               </a:rPr>
               <a:t>연 700개+</a:t>
             </a:r>
@@ -9499,7 +9506,7 @@
                 <a:solidFill>
                   <a:srgbClr val="F4F6FB"/>
                 </a:solidFill>
-                <a:latin typeface="Malgun Gothic"/>
+                <a:latin typeface="Pretendard"/>
               </a:rPr>
               <a:t>받는 가치 (월 환산)</a:t>
             </a:r>
@@ -9538,7 +9545,7 @@
                 <a:solidFill>
                   <a:srgbClr val="4D8BFF"/>
                 </a:solidFill>
-                <a:latin typeface="Malgun Gothic"/>
+                <a:latin typeface="Pretendard"/>
               </a:rPr>
               <a:t>700만원+</a:t>
             </a:r>
@@ -9623,7 +9630,7 @@
                 <a:solidFill>
                   <a:srgbClr val="AEB7C8"/>
                 </a:solidFill>
-                <a:latin typeface="Malgun Gothic"/>
+                <a:latin typeface="Pretendard"/>
               </a:rPr>
               <a:t>내는 비용</a:t>
             </a:r>
@@ -9662,7 +9669,7 @@
                 <a:solidFill>
                   <a:srgbClr val="F4F6FB"/>
                 </a:solidFill>
-                <a:latin typeface="Malgun Gothic"/>
+                <a:latin typeface="Pretendard"/>
               </a:rPr>
               <a:t>월 200만원</a:t>
             </a:r>
@@ -9701,7 +9708,7 @@
                 <a:solidFill>
                   <a:srgbClr val="8B93A7"/>
                 </a:solidFill>
-                <a:latin typeface="Malgun Gothic"/>
+                <a:latin typeface="Pretendard"/>
               </a:rPr>
               <a:t>정액 · 5채널 전부</a:t>
             </a:r>
@@ -9740,7 +9747,7 @@
                 <a:solidFill>
                   <a:srgbClr val="FFB454"/>
                 </a:solidFill>
-                <a:latin typeface="Malgun Gothic"/>
+                <a:latin typeface="Pretendard"/>
               </a:rPr>
               <a:t>3배+</a:t>
             </a:r>
@@ -9779,7 +9786,7 @@
                 <a:solidFill>
                   <a:srgbClr val="AEB7C8"/>
                 </a:solidFill>
-                <a:latin typeface="Malgun Gothic"/>
+                <a:latin typeface="Pretendard"/>
               </a:rPr>
               <a:t>낸 비용 대비 돌아오는 가치</a:t>
             </a:r>
@@ -10038,7 +10045,7 @@
                 <a:solidFill>
                   <a:srgbClr val="4D8BFF"/>
                 </a:solidFill>
-                <a:latin typeface="Malgun Gothic"/>
+                <a:latin typeface="Pretendard"/>
               </a:rPr>
               <a:t>지속의 힘</a:t>
             </a:r>
@@ -10077,7 +10084,7 @@
                 <a:solidFill>
                   <a:srgbClr val="F4F6FB"/>
                 </a:solidFill>
-                <a:latin typeface="Malgun Gothic"/>
+                <a:latin typeface="Pretendard"/>
               </a:rPr>
               <a:t>하루치가 아니라,</a:t>
             </a:r>
@@ -10093,7 +10100,7 @@
                 <a:solidFill>
                   <a:srgbClr val="F4F6FB"/>
                 </a:solidFill>
-                <a:latin typeface="Malgun Gothic"/>
+                <a:latin typeface="Pretendard"/>
               </a:rPr>
               <a:t>1년치가 쌓입니다</a:t>
             </a:r>
@@ -10132,7 +10139,7 @@
                 <a:solidFill>
                   <a:srgbClr val="AEB7C8"/>
                 </a:solidFill>
-                <a:latin typeface="Malgun Gothic"/>
+                <a:latin typeface="Pretendard"/>
               </a:rPr>
               <a:t>매일 벽돌 한 장은 작아 보입니다. 하지만 1년이면 건물이 됩니다. 멈추지 않는 것이 가장 강력한 무기입니다.</a:t>
             </a:r>
@@ -10171,7 +10178,7 @@
                 <a:solidFill>
                   <a:srgbClr val="F4F6FB"/>
                 </a:solidFill>
-                <a:latin typeface="Malgun Gothic"/>
+                <a:latin typeface="Pretendard"/>
               </a:rPr>
               <a:t>365일</a:t>
             </a:r>
@@ -10210,7 +10217,7 @@
                 <a:solidFill>
                   <a:srgbClr val="AEB7C8"/>
                 </a:solidFill>
-                <a:latin typeface="Malgun Gothic"/>
+                <a:latin typeface="Pretendard"/>
               </a:rPr>
               <a:t>쉬지 않고 쌓이는 콘텐츠</a:t>
             </a:r>
@@ -10249,7 +10256,7 @@
                 <a:solidFill>
                   <a:srgbClr val="F4F6FB"/>
                 </a:solidFill>
-                <a:latin typeface="Malgun Gothic"/>
+                <a:latin typeface="Pretendard"/>
               </a:rPr>
               <a:t>5채널</a:t>
             </a:r>
@@ -10288,7 +10295,7 @@
                 <a:solidFill>
                   <a:srgbClr val="AEB7C8"/>
                 </a:solidFill>
-                <a:latin typeface="Malgun Gothic"/>
+                <a:latin typeface="Pretendard"/>
               </a:rPr>
               <a:t>동시에 함께 성장</a:t>
             </a:r>
@@ -10327,7 +10334,7 @@
                 <a:solidFill>
                   <a:srgbClr val="F4F6FB"/>
                 </a:solidFill>
-                <a:latin typeface="Malgun Gothic"/>
+                <a:latin typeface="Pretendard"/>
               </a:rPr>
               <a:t>0회</a:t>
             </a:r>
@@ -10366,7 +10373,7 @@
                 <a:solidFill>
                   <a:srgbClr val="AEB7C8"/>
                 </a:solidFill>
-                <a:latin typeface="Malgun Gothic"/>
+                <a:latin typeface="Pretendard"/>
               </a:rPr>
               <a:t>사람이 멈추는 날</a:t>
             </a:r>
@@ -10625,7 +10632,7 @@
                 <a:solidFill>
                   <a:srgbClr val="4D8BFF"/>
                 </a:solidFill>
-                <a:latin typeface="Malgun Gothic"/>
+                <a:latin typeface="Pretendard"/>
               </a:rPr>
               <a:t>왜 온라인 채널인가</a:t>
             </a:r>
@@ -10664,7 +10671,7 @@
                 <a:solidFill>
                   <a:srgbClr val="F4F6FB"/>
                 </a:solidFill>
-                <a:latin typeface="Malgun Gothic"/>
+                <a:latin typeface="Pretendard"/>
               </a:rPr>
               <a:t>손님은 이미,</a:t>
             </a:r>
@@ -10680,7 +10687,7 @@
                 <a:solidFill>
                   <a:srgbClr val="F4F6FB"/>
                 </a:solidFill>
-                <a:latin typeface="Malgun Gothic"/>
+                <a:latin typeface="Pretendard"/>
               </a:rPr>
               <a:t>온라인에서 우리를 찾습니다</a:t>
             </a:r>
@@ -10719,7 +10726,7 @@
                 <a:solidFill>
                   <a:srgbClr val="AEB7C8"/>
                 </a:solidFill>
-                <a:latin typeface="Malgun Gothic"/>
+                <a:latin typeface="Pretendard"/>
               </a:rPr>
               <a:t>매장에 오기 전에 먼저 검색하는 시대. 그 수요는 우리 브랜드 키워드에서 이미 숫자로 나타납니다.</a:t>
             </a:r>
@@ -10778,7 +10785,7 @@
                 <a:solidFill>
                   <a:srgbClr val="4D8BFF"/>
                 </a:solidFill>
-                <a:latin typeface="Malgun Gothic"/>
+                <a:latin typeface="Pretendard"/>
               </a:rPr>
               <a:t>90,527 회</a:t>
             </a:r>
@@ -10797,7 +10804,7 @@
                 <a:solidFill>
                   <a:srgbClr val="AEB7C8"/>
                 </a:solidFill>
-                <a:latin typeface="Malgun Gothic"/>
+                <a:latin typeface="Pretendard"/>
               </a:rPr>
               <a:t>#마케팅인사이트</a:t>
             </a:r>
@@ -10856,7 +10863,7 @@
                 <a:solidFill>
                   <a:srgbClr val="4D8BFF"/>
                 </a:solidFill>
-                <a:latin typeface="Malgun Gothic"/>
+                <a:latin typeface="Pretendard"/>
               </a:rPr>
               <a:t>70,479 회</a:t>
             </a:r>
@@ -10875,7 +10882,7 @@
                 <a:solidFill>
                   <a:srgbClr val="AEB7C8"/>
                 </a:solidFill>
-                <a:latin typeface="Malgun Gothic"/>
+                <a:latin typeface="Pretendard"/>
               </a:rPr>
               <a:t>#퍼포먼스마케팅</a:t>
             </a:r>
@@ -10934,7 +10941,7 @@
                 <a:solidFill>
                   <a:srgbClr val="4D8BFF"/>
                 </a:solidFill>
-                <a:latin typeface="Malgun Gothic"/>
+                <a:latin typeface="Pretendard"/>
               </a:rPr>
               <a:t>63,725 회</a:t>
             </a:r>
@@ -10953,7 +10960,7 @@
                 <a:solidFill>
                   <a:srgbClr val="AEB7C8"/>
                 </a:solidFill>
-                <a:latin typeface="Malgun Gothic"/>
+                <a:latin typeface="Pretendard"/>
               </a:rPr>
               <a:t>#업계비하인드</a:t>
             </a:r>
@@ -11012,7 +11019,7 @@
                 <a:solidFill>
                   <a:srgbClr val="4D8BFF"/>
                 </a:solidFill>
-                <a:latin typeface="Malgun Gothic"/>
+                <a:latin typeface="Pretendard"/>
               </a:rPr>
               <a:t>41,224 회</a:t>
             </a:r>
@@ -11031,7 +11038,7 @@
                 <a:solidFill>
                   <a:srgbClr val="AEB7C8"/>
                 </a:solidFill>
-                <a:latin typeface="Malgun Gothic"/>
+                <a:latin typeface="Pretendard"/>
               </a:rPr>
               <a:t>#마케팅전략</a:t>
             </a:r>
@@ -11070,7 +11077,7 @@
                 <a:solidFill>
                   <a:srgbClr val="8B93A7"/>
                 </a:solidFill>
-                <a:latin typeface="Malgun Gothic"/>
+                <a:latin typeface="Pretendard"/>
               </a:rPr>
               <a:t>월 검색 지수 · 실제 대시보드의 키워드 조사 데이터 (네이버 연동 시 실측 반영)</a:t>
             </a:r>
@@ -11129,7 +11136,7 @@
                 <a:solidFill>
                   <a:srgbClr val="F4F6FB"/>
                 </a:solidFill>
-                <a:latin typeface="Malgun Gothic"/>
+                <a:latin typeface="Pretendard"/>
               </a:rPr>
               <a:t>🔎 이 검색이 곧 손님입니다</a:t>
             </a:r>
@@ -11148,7 +11155,7 @@
                 <a:solidFill>
                   <a:srgbClr val="AEB7C8"/>
                 </a:solidFill>
-                <a:latin typeface="Malgun Gothic"/>
+                <a:latin typeface="Pretendard"/>
               </a:rPr>
               <a:t>사람들이 찾는 5개 채널에 콘텐츠가 있으면, 광고 없이 찾아옵니다.</a:t>
             </a:r>
@@ -11207,7 +11214,7 @@
                 <a:solidFill>
                   <a:srgbClr val="F4F6FB"/>
                 </a:solidFill>
-                <a:latin typeface="Malgun Gothic"/>
+                <a:latin typeface="Pretendard"/>
               </a:rPr>
               <a:t>🤝 살아있는 채널 = 신뢰</a:t>
             </a:r>
@@ -11226,7 +11233,7 @@
                 <a:solidFill>
                   <a:srgbClr val="AEB7C8"/>
                 </a:solidFill>
-                <a:latin typeface="Malgun Gothic"/>
+                <a:latin typeface="Pretendard"/>
               </a:rPr>
               <a:t>꾸준히 올라오는 채널은 그 자체로 '믿을 만한 브랜드'라는 신호입니다.</a:t>
             </a:r>
@@ -11485,7 +11492,7 @@
                 <a:solidFill>
                   <a:srgbClr val="4D8BFF"/>
                 </a:solidFill>
-                <a:latin typeface="Malgun Gothic"/>
+                <a:latin typeface="Pretendard"/>
               </a:rPr>
               <a:t>강력한 이점</a:t>
             </a:r>
@@ -11524,7 +11531,7 @@
                 <a:solidFill>
                   <a:srgbClr val="F4F6FB"/>
                 </a:solidFill>
-                <a:latin typeface="Malgun Gothic"/>
+                <a:latin typeface="Pretendard"/>
               </a:rPr>
               <a:t>검색과 AI가,</a:t>
             </a:r>
@@ -11540,7 +11547,7 @@
                 <a:solidFill>
                   <a:srgbClr val="F4F6FB"/>
                 </a:solidFill>
-                <a:latin typeface="Malgun Gothic"/>
+                <a:latin typeface="Pretendard"/>
               </a:rPr>
               <a:t>손님을 데려옵니다</a:t>
             </a:r>
@@ -11579,7 +11586,7 @@
                 <a:solidFill>
                   <a:srgbClr val="AEB7C8"/>
                 </a:solidFill>
-                <a:latin typeface="Malgun Gothic"/>
+                <a:latin typeface="Pretendard"/>
               </a:rPr>
               <a:t>콘텐츠가 쌓인다는 건, 인터넷 곳곳에 내 가게 간판을 세우는 것과 같습니다. 광고비를 쓰지 않아도 사람들이 알아서 찾아옵니다.</a:t>
             </a:r>
@@ -11638,7 +11645,7 @@
                 <a:solidFill>
                   <a:srgbClr val="4D8BFF"/>
                 </a:solidFill>
-                <a:latin typeface="Malgun Gothic"/>
+                <a:latin typeface="Pretendard"/>
               </a:rPr>
               <a:t>지금까지 · 검색(SEO)</a:t>
             </a:r>
@@ -11654,7 +11661,7 @@
                 <a:solidFill>
                   <a:srgbClr val="F4F6FB"/>
                 </a:solidFill>
-                <a:latin typeface="Malgun Gothic"/>
+                <a:latin typeface="Pretendard"/>
               </a:rPr>
               <a:t>검색해서 찾아옵니다</a:t>
             </a:r>
@@ -11673,7 +11680,7 @@
                 <a:solidFill>
                   <a:srgbClr val="AEB7C8"/>
                 </a:solidFill>
-                <a:latin typeface="Malgun Gothic"/>
+                <a:latin typeface="Pretendard"/>
               </a:rPr>
               <a:t>글과 영상이 많아질수록 네이버·구글·유튜브 검색에 더 자주 노출됩니다. 광고는 끄면 끝이지만, 콘텐츠는 남아 계속 손님을 데려옵니다.</a:t>
             </a:r>
@@ -11732,7 +11739,7 @@
                 <a:solidFill>
                   <a:srgbClr val="FFB454"/>
                 </a:solidFill>
-                <a:latin typeface="Malgun Gothic"/>
+                <a:latin typeface="Pretendard"/>
               </a:rPr>
               <a:t>앞으로 · AI 추천(GEO)</a:t>
             </a:r>
@@ -11748,7 +11755,7 @@
                 <a:solidFill>
                   <a:srgbClr val="F4F6FB"/>
                 </a:solidFill>
-                <a:latin typeface="Malgun Gothic"/>
+                <a:latin typeface="Pretendard"/>
               </a:rPr>
               <a:t>AI가 추천해 줍니다</a:t>
             </a:r>
@@ -11767,7 +11774,7 @@
                 <a:solidFill>
                   <a:srgbClr val="AEB7C8"/>
                 </a:solidFill>
-                <a:latin typeface="Malgun Gothic"/>
+                <a:latin typeface="Pretendard"/>
               </a:rPr>
               <a:t>이제는 챗봇에게 '추천해줘'라고 묻습니다. 여러 채널에 일관된 콘텐츠가 쌓이면, AI가 우리 브랜드를 더 자주 소개합니다.</a:t>
             </a:r>
@@ -11806,7 +11813,7 @@
                 <a:solidFill>
                   <a:srgbClr val="8B93A7"/>
                 </a:solidFill>
-                <a:latin typeface="Malgun Gothic"/>
+                <a:latin typeface="Pretendard"/>
               </a:rPr>
               <a:t>먼저 콘텐츠를 쌓은 브랜드가, 검색과 AI 시대를 함께 선점합니다.</a:t>
             </a:r>
@@ -12052,7 +12059,7 @@
                 <a:solidFill>
                   <a:srgbClr val="F4F6FB"/>
                 </a:solidFill>
-                <a:latin typeface="Malgun Gothic"/>
+                <a:latin typeface="Pretendard"/>
               </a:rPr>
               <a:t>당신의 브랜드는,</a:t>
             </a:r>
@@ -12068,7 +12075,7 @@
                 <a:solidFill>
                   <a:srgbClr val="F4F6FB"/>
                 </a:solidFill>
-                <a:latin typeface="Malgun Gothic"/>
+                <a:latin typeface="Pretendard"/>
               </a:rPr>
               <a:t>자는 동안에도 자랍니다</a:t>
             </a:r>
@@ -12127,7 +12134,7 @@
                 <a:solidFill>
                   <a:srgbClr val="4D8BFF"/>
                 </a:solidFill>
-                <a:latin typeface="Malgun Gothic"/>
+                <a:latin typeface="Pretendard"/>
               </a:rPr>
               <a:t>월 200만원으로</a:t>
             </a:r>
@@ -12146,7 +12153,7 @@
                 <a:solidFill>
                   <a:srgbClr val="AEB7C8"/>
                 </a:solidFill>
-                <a:latin typeface="Malgun Gothic"/>
+                <a:latin typeface="Pretendard"/>
               </a:rPr>
               <a:t>사람 한 명 몫을 대신하고</a:t>
             </a:r>
@@ -12205,7 +12212,7 @@
                 <a:solidFill>
                   <a:srgbClr val="4D8BFF"/>
                 </a:solidFill>
-                <a:latin typeface="Malgun Gothic"/>
+                <a:latin typeface="Pretendard"/>
               </a:rPr>
               <a:t>5채널이 매일 쌓이고</a:t>
             </a:r>
@@ -12224,7 +12231,7 @@
                 <a:solidFill>
                   <a:srgbClr val="AEB7C8"/>
                 </a:solidFill>
-                <a:latin typeface="Malgun Gothic"/>
+                <a:latin typeface="Pretendard"/>
               </a:rPr>
               <a:t>조사·최적화까지 자동으로</a:t>
             </a:r>
@@ -12283,7 +12290,7 @@
                 <a:solidFill>
                   <a:srgbClr val="4D8BFF"/>
                 </a:solidFill>
-                <a:latin typeface="Malgun Gothic"/>
+                <a:latin typeface="Pretendard"/>
               </a:rPr>
               <a:t>검색·AI가 데려옵니다</a:t>
             </a:r>
@@ -12302,7 +12309,7 @@
                 <a:solidFill>
                   <a:srgbClr val="AEB7C8"/>
                 </a:solidFill>
-                <a:latin typeface="Malgun Gothic"/>
+                <a:latin typeface="Pretendard"/>
               </a:rPr>
               <a:t>광고 없이 손님이 찾아옵니다</a:t>
             </a:r>
@@ -12341,7 +12348,7 @@
                 <a:solidFill>
                   <a:srgbClr val="AEB7C8"/>
                 </a:solidFill>
-                <a:latin typeface="Malgun Gothic"/>
+                <a:latin typeface="Pretendard"/>
               </a:rPr>
               <a:t>● PSLAB · SNS 채널 자동화 솔루션</a:t>
             </a:r>
@@ -12600,7 +12607,7 @@
                 <a:solidFill>
                   <a:srgbClr val="4D8BFF"/>
                 </a:solidFill>
-                <a:latin typeface="Malgun Gothic"/>
+                <a:latin typeface="Pretendard"/>
               </a:rPr>
               <a:t>그런데</a:t>
             </a:r>
@@ -12639,7 +12646,7 @@
                 <a:solidFill>
                   <a:srgbClr val="F4F6FB"/>
                 </a:solidFill>
-                <a:latin typeface="Malgun Gothic"/>
+                <a:latin typeface="Pretendard"/>
               </a:rPr>
               <a:t>사장님은 사업만 하기에도</a:t>
             </a:r>
@@ -12655,7 +12662,7 @@
                 <a:solidFill>
                   <a:srgbClr val="F4F6FB"/>
                 </a:solidFill>
-                <a:latin typeface="Malgun Gothic"/>
+                <a:latin typeface="Pretendard"/>
               </a:rPr>
               <a:t>이미 바쁩니다</a:t>
             </a:r>
@@ -12694,7 +12701,7 @@
                 <a:solidFill>
                   <a:srgbClr val="AEB7C8"/>
                 </a:solidFill>
-                <a:latin typeface="Malgun Gothic"/>
+                <a:latin typeface="Pretendard"/>
               </a:rPr>
               <a:t>요즘은 채널 하나로 부족합니다. 채널 다섯 곳에 매일 글을 올리는 일은, 매일 아침 가게 문 다섯 개를 직접 여는 것과 같습니다.</a:t>
             </a:r>
@@ -12753,7 +12760,7 @@
                 <a:solidFill>
                   <a:srgbClr val="F4F6FB"/>
                 </a:solidFill>
-                <a:latin typeface="Malgun Gothic"/>
+                <a:latin typeface="Pretendard"/>
               </a:rPr>
               <a:t>5개 채널</a:t>
             </a:r>
@@ -12772,7 +12779,7 @@
                 <a:solidFill>
                   <a:srgbClr val="AEB7C8"/>
                 </a:solidFill>
-                <a:latin typeface="Malgun Gothic"/>
+                <a:latin typeface="Pretendard"/>
               </a:rPr>
               <a:t>매일 올려야 할 곳</a:t>
             </a:r>
@@ -12831,7 +12838,7 @@
                 <a:solidFill>
                   <a:srgbClr val="F4F6FB"/>
                 </a:solidFill>
-                <a:latin typeface="Malgun Gothic"/>
+                <a:latin typeface="Pretendard"/>
               </a:rPr>
               <a:t>쉬는 날 없이</a:t>
             </a:r>
@@ -12850,7 +12857,7 @@
                 <a:solidFill>
                   <a:srgbClr val="AEB7C8"/>
                 </a:solidFill>
-                <a:latin typeface="Malgun Gothic"/>
+                <a:latin typeface="Pretendard"/>
               </a:rPr>
               <a:t>주말·휴일에도 반복</a:t>
             </a:r>
@@ -12909,7 +12916,7 @@
                 <a:solidFill>
                   <a:srgbClr val="F4F6FB"/>
                 </a:solidFill>
-                <a:latin typeface="Malgun Gothic"/>
+                <a:latin typeface="Pretendard"/>
               </a:rPr>
               <a:t>글·사진·영상</a:t>
             </a:r>
@@ -12928,7 +12935,7 @@
                 <a:solidFill>
                   <a:srgbClr val="AEB7C8"/>
                 </a:solidFill>
-                <a:latin typeface="Malgun Gothic"/>
+                <a:latin typeface="Pretendard"/>
               </a:rPr>
               <a:t>매번 새로 제작</a:t>
             </a:r>
@@ -13187,7 +13194,7 @@
                 <a:solidFill>
                   <a:srgbClr val="4D8BFF"/>
                 </a:solidFill>
-                <a:latin typeface="Malgun Gothic"/>
+                <a:latin typeface="Pretendard"/>
               </a:rPr>
               <a:t>지금의 현실</a:t>
             </a:r>
@@ -13226,7 +13233,7 @@
                 <a:solidFill>
                   <a:srgbClr val="F4F6FB"/>
                 </a:solidFill>
-                <a:latin typeface="Malgun Gothic"/>
+                <a:latin typeface="Pretendard"/>
               </a:rPr>
               <a:t>그래서 대부분,</a:t>
             </a:r>
@@ -13242,7 +13249,7 @@
                 <a:solidFill>
                   <a:srgbClr val="F4F6FB"/>
                 </a:solidFill>
-                <a:latin typeface="Malgun Gothic"/>
+                <a:latin typeface="Pretendard"/>
               </a:rPr>
               <a:t>셋 중 하나가 됩니다</a:t>
             </a:r>
@@ -13301,7 +13308,7 @@
                 <a:solidFill>
                   <a:srgbClr val="4D8BFF"/>
                 </a:solidFill>
-                <a:latin typeface="Malgun Gothic"/>
+                <a:latin typeface="Pretendard"/>
               </a:rPr>
               <a:t>하나</a:t>
             </a:r>
@@ -13317,7 +13324,7 @@
                 <a:solidFill>
                   <a:srgbClr val="F4F6FB"/>
                 </a:solidFill>
-                <a:latin typeface="Malgun Gothic"/>
+                <a:latin typeface="Pretendard"/>
               </a:rPr>
               <a:t>사람을 씁니다</a:t>
             </a:r>
@@ -13336,7 +13343,7 @@
                 <a:solidFill>
                   <a:srgbClr val="AEB7C8"/>
                 </a:solidFill>
-                <a:latin typeface="Malgun Gothic"/>
+                <a:latin typeface="Pretendard"/>
               </a:rPr>
               <a:t>직원이나 대행사에 맡깁니다. 매달 수백만 원이 고정으로 나갑니다.</a:t>
             </a:r>
@@ -13395,7 +13402,7 @@
                 <a:solidFill>
                   <a:srgbClr val="4D8BFF"/>
                 </a:solidFill>
-                <a:latin typeface="Malgun Gothic"/>
+                <a:latin typeface="Pretendard"/>
               </a:rPr>
               <a:t>둘</a:t>
             </a:r>
@@ -13411,7 +13418,7 @@
                 <a:solidFill>
                   <a:srgbClr val="F4F6FB"/>
                 </a:solidFill>
-                <a:latin typeface="Malgun Gothic"/>
+                <a:latin typeface="Pretendard"/>
               </a:rPr>
               <a:t>며칠 하다 멈춥니다</a:t>
             </a:r>
@@ -13430,7 +13437,7 @@
                 <a:solidFill>
                   <a:srgbClr val="AEB7C8"/>
                 </a:solidFill>
-                <a:latin typeface="Malgun Gothic"/>
+                <a:latin typeface="Pretendard"/>
               </a:rPr>
               <a:t>바빠지면 손을 놓습니다. 채널은 몇 주째 방치됩니다.</a:t>
             </a:r>
@@ -13489,7 +13496,7 @@
                 <a:solidFill>
                   <a:srgbClr val="4D8BFF"/>
                 </a:solidFill>
-                <a:latin typeface="Malgun Gothic"/>
+                <a:latin typeface="Pretendard"/>
               </a:rPr>
               <a:t>셋</a:t>
             </a:r>
@@ -13505,7 +13512,7 @@
                 <a:solidFill>
                   <a:srgbClr val="F4F6FB"/>
                 </a:solidFill>
-                <a:latin typeface="Malgun Gothic"/>
+                <a:latin typeface="Pretendard"/>
               </a:rPr>
               <a:t>시작을 못 합니다</a:t>
             </a:r>
@@ -13524,7 +13531,7 @@
                 <a:solidFill>
                   <a:srgbClr val="AEB7C8"/>
                 </a:solidFill>
-                <a:latin typeface="Malgun Gothic"/>
+                <a:latin typeface="Pretendard"/>
               </a:rPr>
               <a:t>'나중에'가 반복됩니다. 경쟁사가 앞서가는 걸 지켜만 봅니다.</a:t>
             </a:r>
@@ -13783,7 +13790,7 @@
                 <a:solidFill>
                   <a:srgbClr val="4D8BFF"/>
                 </a:solidFill>
-                <a:latin typeface="Malgun Gothic"/>
+                <a:latin typeface="Pretendard"/>
               </a:rPr>
               <a:t>우리의 약속</a:t>
             </a:r>
@@ -13822,7 +13829,7 @@
                 <a:solidFill>
                   <a:srgbClr val="F4F6FB"/>
                 </a:solidFill>
-                <a:latin typeface="Malgun Gothic"/>
+                <a:latin typeface="Pretendard"/>
               </a:rPr>
               <a:t>이 세 가지 걱정을,</a:t>
             </a:r>
@@ -13838,7 +13845,7 @@
                 <a:solidFill>
                   <a:srgbClr val="F4F6FB"/>
                 </a:solidFill>
-                <a:latin typeface="Malgun Gothic"/>
+                <a:latin typeface="Pretendard"/>
               </a:rPr>
               <a:t>한 번에 없앱니다</a:t>
             </a:r>
@@ -13897,7 +13904,7 @@
                 <a:solidFill>
                   <a:srgbClr val="4D8BFF"/>
                 </a:solidFill>
-                <a:latin typeface="Malgun Gothic"/>
+                <a:latin typeface="Pretendard"/>
               </a:rPr>
               <a:t>안 올려도 올라갑니다</a:t>
             </a:r>
@@ -13916,7 +13923,7 @@
                 <a:solidFill>
                   <a:srgbClr val="AEB7C8"/>
                 </a:solidFill>
-                <a:latin typeface="Malgun Gothic"/>
+                <a:latin typeface="Pretendard"/>
               </a:rPr>
               <a:t>사람이 없어도 매일 자동 발행</a:t>
             </a:r>
@@ -13975,7 +13982,7 @@
                 <a:solidFill>
                   <a:srgbClr val="4D8BFF"/>
                 </a:solidFill>
-                <a:latin typeface="Malgun Gothic"/>
+                <a:latin typeface="Pretendard"/>
               </a:rPr>
               <a:t>멈추지 않습니다</a:t>
             </a:r>
@@ -13994,7 +14001,7 @@
                 <a:solidFill>
                   <a:srgbClr val="AEB7C8"/>
                 </a:solidFill>
-                <a:latin typeface="Malgun Gothic"/>
+                <a:latin typeface="Pretendard"/>
               </a:rPr>
               <a:t>24시간 쉬지 않고 자동 운영</a:t>
             </a:r>
@@ -14053,7 +14060,7 @@
                 <a:solidFill>
                   <a:srgbClr val="4D8BFF"/>
                 </a:solidFill>
-                <a:latin typeface="Malgun Gothic"/>
+                <a:latin typeface="Pretendard"/>
               </a:rPr>
               <a:t>지금 시작합니다</a:t>
             </a:r>
@@ -14072,7 +14079,7 @@
                 <a:solidFill>
                   <a:srgbClr val="AEB7C8"/>
                 </a:solidFill>
-                <a:latin typeface="Malgun Gothic"/>
+                <a:latin typeface="Pretendard"/>
               </a:rPr>
               <a:t>세팅만 하면 오늘부터 가동</a:t>
             </a:r>
@@ -14331,7 +14338,7 @@
                 <a:solidFill>
                   <a:srgbClr val="4D8BFF"/>
                 </a:solidFill>
-                <a:latin typeface="Malgun Gothic"/>
+                <a:latin typeface="Pretendard"/>
               </a:rPr>
               <a:t>어떻게 돌아가나요</a:t>
             </a:r>
@@ -14370,7 +14377,7 @@
                 <a:solidFill>
                   <a:srgbClr val="F4F6FB"/>
                 </a:solidFill>
-                <a:latin typeface="Malgun Gothic"/>
+                <a:latin typeface="Pretendard"/>
               </a:rPr>
               <a:t>한 바퀴가 저절로 도는, 네 단계</a:t>
             </a:r>
@@ -14409,7 +14416,7 @@
                 <a:solidFill>
                   <a:srgbClr val="AEB7C8"/>
                 </a:solidFill>
-                <a:latin typeface="Malgun Gothic"/>
+                <a:latin typeface="Pretendard"/>
               </a:rPr>
               <a:t>사람은 처음에 방향만 정해주면 됩니다. 그다음부터는 이 네 단계가 매일 스스로 반복됩니다.</a:t>
             </a:r>
@@ -14468,7 +14475,7 @@
                 <a:solidFill>
                   <a:srgbClr val="4D8BFF"/>
                 </a:solidFill>
-                <a:latin typeface="Malgun Gothic"/>
+                <a:latin typeface="Pretendard"/>
               </a:rPr>
               <a:t>STEP 1</a:t>
             </a:r>
@@ -14484,7 +14491,7 @@
                 <a:solidFill>
                   <a:srgbClr val="F4F6FB"/>
                 </a:solidFill>
-                <a:latin typeface="Malgun Gothic"/>
+                <a:latin typeface="Pretendard"/>
               </a:rPr>
               <a:t>조사 · 기획</a:t>
             </a:r>
@@ -14503,7 +14510,7 @@
                 <a:solidFill>
                   <a:srgbClr val="AEB7C8"/>
                 </a:solidFill>
-                <a:latin typeface="Malgun Gothic"/>
+                <a:latin typeface="Pretendard"/>
               </a:rPr>
               <a:t>시장·경쟁사·키워드를 살펴 반응 나올 주제를 잡습니다.</a:t>
             </a:r>
@@ -14562,7 +14569,7 @@
                 <a:solidFill>
                   <a:srgbClr val="4D8BFF"/>
                 </a:solidFill>
-                <a:latin typeface="Malgun Gothic"/>
+                <a:latin typeface="Pretendard"/>
               </a:rPr>
               <a:t>STEP 2</a:t>
             </a:r>
@@ -14578,7 +14585,7 @@
                 <a:solidFill>
                   <a:srgbClr val="F4F6FB"/>
                 </a:solidFill>
-                <a:latin typeface="Malgun Gothic"/>
+                <a:latin typeface="Pretendard"/>
               </a:rPr>
               <a:t>글·이미지·영상 제작</a:t>
             </a:r>
@@ -14597,7 +14604,7 @@
                 <a:solidFill>
                   <a:srgbClr val="AEB7C8"/>
                 </a:solidFill>
-                <a:latin typeface="Malgun Gothic"/>
+                <a:latin typeface="Pretendard"/>
               </a:rPr>
               <a:t>전문가 말투의 글과 카드·쇼츠를 자동으로 만듭니다.</a:t>
             </a:r>
@@ -14656,7 +14663,7 @@
                 <a:solidFill>
                   <a:srgbClr val="4D8BFF"/>
                 </a:solidFill>
-                <a:latin typeface="Malgun Gothic"/>
+                <a:latin typeface="Pretendard"/>
               </a:rPr>
               <a:t>STEP 3</a:t>
             </a:r>
@@ -14672,7 +14679,7 @@
                 <a:solidFill>
                   <a:srgbClr val="F4F6FB"/>
                 </a:solidFill>
-                <a:latin typeface="Malgun Gothic"/>
+                <a:latin typeface="Pretendard"/>
               </a:rPr>
               <a:t>5채널 동시 발행</a:t>
             </a:r>
@@ -14691,7 +14698,7 @@
                 <a:solidFill>
                   <a:srgbClr val="AEB7C8"/>
                 </a:solidFill>
-                <a:latin typeface="Malgun Gothic"/>
+                <a:latin typeface="Pretendard"/>
               </a:rPr>
               <a:t>매일 정해진 시각에 다섯 채널로 한 번에.</a:t>
             </a:r>
@@ -14750,7 +14757,7 @@
                 <a:solidFill>
                   <a:srgbClr val="4D8BFF"/>
                 </a:solidFill>
-                <a:latin typeface="Malgun Gothic"/>
+                <a:latin typeface="Pretendard"/>
               </a:rPr>
               <a:t>STEP 4</a:t>
             </a:r>
@@ -14766,7 +14773,7 @@
                 <a:solidFill>
                   <a:srgbClr val="F4F6FB"/>
                 </a:solidFill>
-                <a:latin typeface="Malgun Gothic"/>
+                <a:latin typeface="Pretendard"/>
               </a:rPr>
               <a:t>성과 학습 · 최적화</a:t>
             </a:r>
@@ -14785,7 +14792,7 @@
                 <a:solidFill>
                   <a:srgbClr val="AEB7C8"/>
                 </a:solidFill>
-                <a:latin typeface="Malgun Gothic"/>
+                <a:latin typeface="Pretendard"/>
               </a:rPr>
               <a:t>반응을 배워 다음 기획을 더 정교하게 다듬습니다.</a:t>
             </a:r>
@@ -14824,7 +14831,7 @@
                 <a:solidFill>
                   <a:srgbClr val="4D8BFF"/>
                 </a:solidFill>
-                <a:latin typeface="Malgun Gothic"/>
+                <a:latin typeface="Pretendard"/>
               </a:rPr>
               <a:t>↻  다시 1번으로 · 매일 자동 반복</a:t>
             </a:r>
@@ -15083,7 +15090,7 @@
                 <a:solidFill>
                   <a:srgbClr val="FFB454"/>
                 </a:solidFill>
-                <a:latin typeface="Malgun Gothic"/>
+                <a:latin typeface="Pretendard"/>
               </a:rPr>
               <a:t>핵심 차별점</a:t>
             </a:r>
@@ -15122,7 +15129,7 @@
                 <a:solidFill>
                   <a:srgbClr val="F4F6FB"/>
                 </a:solidFill>
-                <a:latin typeface="Malgun Gothic"/>
+                <a:latin typeface="Pretendard"/>
               </a:rPr>
               <a:t>그냥 올리기만 하지</a:t>
             </a:r>
@@ -15138,7 +15145,7 @@
                 <a:solidFill>
                   <a:srgbClr val="F4F6FB"/>
                 </a:solidFill>
-                <a:latin typeface="Malgun Gothic"/>
+                <a:latin typeface="Pretendard"/>
               </a:rPr>
               <a:t>않습니다</a:t>
             </a:r>
@@ -15177,7 +15184,7 @@
                 <a:solidFill>
                   <a:srgbClr val="AEB7C8"/>
                 </a:solidFill>
-                <a:latin typeface="Malgun Gothic"/>
+                <a:latin typeface="Pretendard"/>
               </a:rPr>
               <a:t>시장·경쟁사·브랜드를 계속 살펴, 매번 더 잘 되는 쪽으로 다듬습니다.</a:t>
             </a:r>
@@ -15236,7 +15243,7 @@
                 <a:solidFill>
                   <a:srgbClr val="F4F6FB"/>
                 </a:solidFill>
-                <a:latin typeface="Malgun Gothic"/>
+                <a:latin typeface="Pretendard"/>
               </a:rPr>
               <a:t>🔍 시장 조사</a:t>
             </a:r>
@@ -15255,7 +15262,7 @@
                 <a:solidFill>
                   <a:srgbClr val="AEB7C8"/>
                 </a:solidFill>
-                <a:latin typeface="Malgun Gothic"/>
+                <a:latin typeface="Pretendard"/>
               </a:rPr>
               <a:t>키워드 검색량·트렌드를 조사해 반응 나올 주제부터 공략합니다.</a:t>
             </a:r>
@@ -15314,7 +15321,7 @@
                 <a:solidFill>
                   <a:srgbClr val="F4F6FB"/>
                 </a:solidFill>
-                <a:latin typeface="Malgun Gothic"/>
+                <a:latin typeface="Pretendard"/>
               </a:rPr>
               <a:t>🎯 경쟁사 조사</a:t>
             </a:r>
@@ -15333,7 +15340,7 @@
                 <a:solidFill>
                   <a:srgbClr val="AEB7C8"/>
                 </a:solidFill>
-                <a:latin typeface="Malgun Gothic"/>
+                <a:latin typeface="Pretendard"/>
               </a:rPr>
               <a:t>잘 나가는 경쟁 계정을 모니터링 — 좋은 건 배우고 빈틈은 파고듭니다.</a:t>
             </a:r>
@@ -15392,7 +15399,7 @@
                 <a:solidFill>
                   <a:srgbClr val="F4F6FB"/>
                 </a:solidFill>
-                <a:latin typeface="Malgun Gothic"/>
+                <a:latin typeface="Pretendard"/>
               </a:rPr>
               <a:t>🧭 브랜드 분석</a:t>
             </a:r>
@@ -15411,7 +15418,7 @@
                 <a:solidFill>
                   <a:srgbClr val="AEB7C8"/>
                 </a:solidFill>
-                <a:latin typeface="Malgun Gothic"/>
+                <a:latin typeface="Pretendard"/>
               </a:rPr>
               <a:t>우리 브랜드의 톤·강점에 맞춰 메시지를 조정합니다.</a:t>
             </a:r>
@@ -15516,7 +15523,7 @@
                 <a:solidFill>
                   <a:srgbClr val="8B93A7"/>
                 </a:solidFill>
-                <a:latin typeface="Malgun Gothic"/>
+                <a:latin typeface="Pretendard"/>
               </a:rPr>
               <a:t>pslab — 키워드·시장 조사</a:t>
             </a:r>
@@ -15579,7 +15586,7 @@
                 <a:solidFill>
                   <a:srgbClr val="8B93A7"/>
                 </a:solidFill>
-                <a:latin typeface="Malgun Gothic"/>
+                <a:latin typeface="Pretendard"/>
               </a:rPr>
               <a:t>실제 대시보드 — 키워드별 검색량·경쟁도를 보고 주제를 고릅니다.</a:t>
             </a:r>
@@ -15838,7 +15845,7 @@
                 <a:solidFill>
                   <a:srgbClr val="4D8BFF"/>
                 </a:solidFill>
-                <a:latin typeface="Malgun Gothic"/>
+                <a:latin typeface="Pretendard"/>
               </a:rPr>
               <a:t>한 화면</a:t>
             </a:r>
@@ -15877,7 +15884,7 @@
                 <a:solidFill>
                   <a:srgbClr val="F4F6FB"/>
                 </a:solidFill>
-                <a:latin typeface="Malgun Gothic"/>
+                <a:latin typeface="Pretendard"/>
               </a:rPr>
               <a:t>모든 채널이, 이 화면 하나에</a:t>
             </a:r>
@@ -15982,7 +15989,7 @@
                 <a:solidFill>
                   <a:srgbClr val="8B93A7"/>
                 </a:solidFill>
-                <a:latin typeface="Malgun Gothic"/>
+                <a:latin typeface="Pretendard"/>
               </a:rPr>
               <a:t>leejiho-pslab.github.io/pslab — 콘텐츠 관제실</a:t>
             </a:r>
@@ -16045,7 +16052,7 @@
                 <a:solidFill>
                   <a:srgbClr val="AEB7C8"/>
                 </a:solidFill>
-                <a:latin typeface="Malgun Gothic"/>
+                <a:latin typeface="Pretendard"/>
               </a:rPr>
               <a:t>다섯 개 채널의 상태·예정·성과를 링크 하나로 어디서든 확인합니다. 설치도, 복잡한 로그인도 없습니다.</a:t>
             </a:r>
@@ -16304,7 +16311,7 @@
                 <a:solidFill>
                   <a:srgbClr val="4D8BFF"/>
                 </a:solidFill>
-                <a:latin typeface="Malgun Gothic"/>
+                <a:latin typeface="Pretendard"/>
               </a:rPr>
               <a:t>안에서는 이렇게</a:t>
             </a:r>
@@ -16343,7 +16350,7 @@
                 <a:solidFill>
                   <a:srgbClr val="F4F6FB"/>
                 </a:solidFill>
-                <a:latin typeface="Malgun Gothic"/>
+                <a:latin typeface="Pretendard"/>
               </a:rPr>
               <a:t>콘텐츠를 열면, 안까지 다 보입니다</a:t>
             </a:r>
@@ -16448,7 +16455,7 @@
                 <a:solidFill>
                   <a:srgbClr val="8B93A7"/>
                 </a:solidFill>
-                <a:latin typeface="Malgun Gothic"/>
+                <a:latin typeface="Pretendard"/>
               </a:rPr>
               <a:t>pslab — 콘텐츠 상세</a:t>
             </a:r>
@@ -16531,7 +16538,7 @@
                 <a:solidFill>
                   <a:srgbClr val="F4F6FB"/>
                 </a:solidFill>
-                <a:latin typeface="Malgun Gothic"/>
+                <a:latin typeface="Pretendard"/>
               </a:rPr>
               <a:t>1   채널에서 콘텐츠 클릭</a:t>
             </a:r>
@@ -16590,7 +16597,7 @@
                 <a:solidFill>
                   <a:srgbClr val="AEB7C8"/>
                 </a:solidFill>
-                <a:latin typeface="Malgun Gothic"/>
+                <a:latin typeface="Pretendard"/>
               </a:rPr>
               <a:t>2   콘텐츠 내용 전체 확인</a:t>
             </a:r>
@@ -16649,7 +16656,7 @@
                 <a:solidFill>
                   <a:srgbClr val="AEB7C8"/>
                 </a:solidFill>
-                <a:latin typeface="Malgun Gothic"/>
+                <a:latin typeface="Pretendard"/>
               </a:rPr>
               <a:t>3   복사 · 다운로드 · 수정 메뉴</a:t>
             </a:r>
@@ -16688,7 +16695,7 @@
                 <a:solidFill>
                   <a:srgbClr val="8B93A7"/>
                 </a:solidFill>
-                <a:latin typeface="Malgun Gothic"/>
+                <a:latin typeface="Pretendard"/>
               </a:rPr>
               <a:t>채널 이동 → 콘텐츠 클릭 → 상세 내용 → 수정·복사 메뉴까지, 대시보드 안에서 바로 확인·관리합니다.</a:t>
             </a:r>
